--- a/Metodos_Estatisticos/slides/MAT02201_MET_EST_apresentacao_da_disciplina.pptx
+++ b/Metodos_Estatisticos/slides/MAT02201_MET_EST_apresentacao_da_disciplina.pptx
@@ -123,43 +123,20 @@
 <file path=ppt/changesInfos/changesInfo1.xml><?xml version="1.0" encoding="utf-8"?>
 <pc:chgInfo xmlns:a="http://schemas.openxmlformats.org/drawingml/2006/main" xmlns:r="http://schemas.openxmlformats.org/officeDocument/2006/relationships" xmlns:ac="http://schemas.microsoft.com/office/drawing/2013/main/command" xmlns:pc="http://schemas.microsoft.com/office/powerpoint/2013/main/command">
   <pc:docChgLst>
-    <pc:chgData name="Renan Xavier Cortes" userId="d6af805853004405" providerId="LiveId" clId="{950B5AFF-F132-4192-98BF-4A1EDF544CA7}"/>
-    <pc:docChg chg="undo custSel modSld">
-      <pc:chgData name="Renan Xavier Cortes" userId="d6af805853004405" providerId="LiveId" clId="{950B5AFF-F132-4192-98BF-4A1EDF544CA7}" dt="2026-01-30T13:23:17.567" v="500" actId="20577"/>
+    <pc:chgData name="Renan Xavier Cortes" userId="d6af805853004405" providerId="LiveId" clId="{65178925-553F-44CD-8832-B58BC3905EFA}"/>
+    <pc:docChg chg="modSld">
+      <pc:chgData name="Renan Xavier Cortes" userId="d6af805853004405" providerId="LiveId" clId="{65178925-553F-44CD-8832-B58BC3905EFA}" dt="2026-02-06T18:49:22.395" v="28" actId="20577"/>
       <pc:docMkLst>
         <pc:docMk/>
       </pc:docMkLst>
       <pc:sldChg chg="modSp mod">
-        <pc:chgData name="Renan Xavier Cortes" userId="d6af805853004405" providerId="LiveId" clId="{950B5AFF-F132-4192-98BF-4A1EDF544CA7}" dt="2026-01-29T19:44:12.067" v="25" actId="20577"/>
-        <pc:sldMkLst>
-          <pc:docMk/>
-          <pc:sldMk cId="193773268" sldId="256"/>
-        </pc:sldMkLst>
-        <pc:spChg chg="mod">
-          <ac:chgData name="Renan Xavier Cortes" userId="d6af805853004405" providerId="LiveId" clId="{950B5AFF-F132-4192-98BF-4A1EDF544CA7}" dt="2026-01-29T19:44:12.067" v="25" actId="20577"/>
-          <ac:spMkLst>
-            <pc:docMk/>
-            <pc:sldMk cId="193773268" sldId="256"/>
-            <ac:spMk id="2" creationId="{F46BAB02-4578-42EC-A9FB-F4446897095D}"/>
-          </ac:spMkLst>
-        </pc:spChg>
-      </pc:sldChg>
-      <pc:sldChg chg="modSp mod">
-        <pc:chgData name="Renan Xavier Cortes" userId="d6af805853004405" providerId="LiveId" clId="{950B5AFF-F132-4192-98BF-4A1EDF544CA7}" dt="2026-01-29T19:47:00.124" v="172" actId="20577"/>
+        <pc:chgData name="Renan Xavier Cortes" userId="d6af805853004405" providerId="LiveId" clId="{65178925-553F-44CD-8832-B58BC3905EFA}" dt="2026-02-06T18:49:22.395" v="28" actId="20577"/>
         <pc:sldMkLst>
           <pc:docMk/>
           <pc:sldMk cId="1859719164" sldId="259"/>
         </pc:sldMkLst>
         <pc:spChg chg="mod">
-          <ac:chgData name="Renan Xavier Cortes" userId="d6af805853004405" providerId="LiveId" clId="{950B5AFF-F132-4192-98BF-4A1EDF544CA7}" dt="2026-01-29T19:44:54.572" v="60" actId="20577"/>
-          <ac:spMkLst>
-            <pc:docMk/>
-            <pc:sldMk cId="1859719164" sldId="259"/>
-            <ac:spMk id="8" creationId="{39AE06C5-34BE-4D68-97C3-4C07702C2DF6}"/>
-          </ac:spMkLst>
-        </pc:spChg>
-        <pc:spChg chg="mod">
-          <ac:chgData name="Renan Xavier Cortes" userId="d6af805853004405" providerId="LiveId" clId="{950B5AFF-F132-4192-98BF-4A1EDF544CA7}" dt="2026-01-29T19:47:00.124" v="172" actId="20577"/>
+          <ac:chgData name="Renan Xavier Cortes" userId="d6af805853004405" providerId="LiveId" clId="{65178925-553F-44CD-8832-B58BC3905EFA}" dt="2026-02-06T18:49:22.395" v="28" actId="20577"/>
           <ac:spMkLst>
             <pc:docMk/>
             <pc:sldMk cId="1859719164" sldId="259"/>
@@ -167,118 +144,56 @@
           </ac:spMkLst>
         </pc:spChg>
       </pc:sldChg>
-      <pc:sldChg chg="addSp delSp modSp mod">
-        <pc:chgData name="Renan Xavier Cortes" userId="d6af805853004405" providerId="LiveId" clId="{950B5AFF-F132-4192-98BF-4A1EDF544CA7}" dt="2026-01-29T19:47:47.607" v="174"/>
+      <pc:sldChg chg="modSp mod">
+        <pc:chgData name="Renan Xavier Cortes" userId="d6af805853004405" providerId="LiveId" clId="{65178925-553F-44CD-8832-B58BC3905EFA}" dt="2026-02-06T18:45:22.605" v="7" actId="20577"/>
         <pc:sldMkLst>
           <pc:docMk/>
           <pc:sldMk cId="1152571280" sldId="288"/>
         </pc:sldMkLst>
-        <pc:spChg chg="add mod">
-          <ac:chgData name="Renan Xavier Cortes" userId="d6af805853004405" providerId="LiveId" clId="{950B5AFF-F132-4192-98BF-4A1EDF544CA7}" dt="2026-01-29T19:47:47.607" v="174"/>
+        <pc:spChg chg="mod">
+          <ac:chgData name="Renan Xavier Cortes" userId="d6af805853004405" providerId="LiveId" clId="{65178925-553F-44CD-8832-B58BC3905EFA}" dt="2026-02-06T18:45:22.605" v="7" actId="20577"/>
           <ac:spMkLst>
             <pc:docMk/>
             <pc:sldMk cId="1152571280" sldId="288"/>
-            <ac:spMk id="4" creationId="{03AAB837-2F12-2CBA-1DBC-3BC1614B82E6}"/>
-          </ac:spMkLst>
-        </pc:spChg>
-        <pc:spChg chg="del">
-          <ac:chgData name="Renan Xavier Cortes" userId="d6af805853004405" providerId="LiveId" clId="{950B5AFF-F132-4192-98BF-4A1EDF544CA7}" dt="2026-01-29T19:47:46.967" v="173" actId="478"/>
-          <ac:spMkLst>
-            <pc:docMk/>
-            <pc:sldMk cId="1152571280" sldId="288"/>
-            <ac:spMk id="8" creationId="{39AE06C5-34BE-4D68-97C3-4C07702C2DF6}"/>
+            <ac:spMk id="14" creationId="{427DBFEB-81BF-4CC3-A411-FBF43D295C56}"/>
           </ac:spMkLst>
         </pc:spChg>
       </pc:sldChg>
-      <pc:sldChg chg="addSp delSp modSp mod">
-        <pc:chgData name="Renan Xavier Cortes" userId="d6af805853004405" providerId="LiveId" clId="{950B5AFF-F132-4192-98BF-4A1EDF544CA7}" dt="2026-01-29T19:59:17.396" v="409" actId="1076"/>
+      <pc:sldChg chg="modSp mod">
+        <pc:chgData name="Renan Xavier Cortes" userId="d6af805853004405" providerId="LiveId" clId="{65178925-553F-44CD-8832-B58BC3905EFA}" dt="2026-02-06T18:46:26.375" v="9" actId="20577"/>
+        <pc:sldMkLst>
+          <pc:docMk/>
+          <pc:sldMk cId="3980882677" sldId="291"/>
+        </pc:sldMkLst>
+        <pc:spChg chg="mod">
+          <ac:chgData name="Renan Xavier Cortes" userId="d6af805853004405" providerId="LiveId" clId="{65178925-553F-44CD-8832-B58BC3905EFA}" dt="2026-02-06T18:46:26.375" v="9" actId="20577"/>
+          <ac:spMkLst>
+            <pc:docMk/>
+            <pc:sldMk cId="3980882677" sldId="291"/>
+            <ac:spMk id="14" creationId="{427DBFEB-81BF-4CC3-A411-FBF43D295C56}"/>
+          </ac:spMkLst>
+        </pc:spChg>
+      </pc:sldChg>
+    </pc:docChg>
+  </pc:docChgLst>
+  <pc:docChgLst>
+    <pc:chgData name="Renan Xavier Cortes" userId="d6af805853004405" providerId="LiveId" clId="{CF82A937-C4F3-44CF-9100-1D2F0D2BED4D}"/>
+    <pc:docChg chg="modSld">
+      <pc:chgData name="Renan Xavier Cortes" userId="d6af805853004405" providerId="LiveId" clId="{CF82A937-C4F3-44CF-9100-1D2F0D2BED4D}" dt="2026-01-30T18:28:37.452" v="45" actId="20577"/>
+      <pc:docMkLst>
+        <pc:docMk/>
+      </pc:docMkLst>
+      <pc:sldChg chg="modSp mod">
+        <pc:chgData name="Renan Xavier Cortes" userId="d6af805853004405" providerId="LiveId" clId="{CF82A937-C4F3-44CF-9100-1D2F0D2BED4D}" dt="2026-01-30T18:28:37.452" v="45" actId="20577"/>
         <pc:sldMkLst>
           <pc:docMk/>
           <pc:sldMk cId="1265083167" sldId="289"/>
         </pc:sldMkLst>
-        <pc:spChg chg="add mod">
-          <ac:chgData name="Renan Xavier Cortes" userId="d6af805853004405" providerId="LiveId" clId="{950B5AFF-F132-4192-98BF-4A1EDF544CA7}" dt="2026-01-29T19:47:57.275" v="176"/>
+        <pc:spChg chg="mod">
+          <ac:chgData name="Renan Xavier Cortes" userId="d6af805853004405" providerId="LiveId" clId="{CF82A937-C4F3-44CF-9100-1D2F0D2BED4D}" dt="2026-01-30T18:28:37.452" v="45" actId="20577"/>
           <ac:spMkLst>
             <pc:docMk/>
             <pc:sldMk cId="1265083167" sldId="289"/>
-            <ac:spMk id="4" creationId="{BA4993BB-961F-3B68-9972-1610281ECC90}"/>
-          </ac:spMkLst>
-        </pc:spChg>
-        <pc:spChg chg="del">
-          <ac:chgData name="Renan Xavier Cortes" userId="d6af805853004405" providerId="LiveId" clId="{950B5AFF-F132-4192-98BF-4A1EDF544CA7}" dt="2026-01-29T19:47:56.666" v="175" actId="478"/>
-          <ac:spMkLst>
-            <pc:docMk/>
-            <pc:sldMk cId="1265083167" sldId="289"/>
-            <ac:spMk id="8" creationId="{39AE06C5-34BE-4D68-97C3-4C07702C2DF6}"/>
-          </ac:spMkLst>
-        </pc:spChg>
-        <pc:spChg chg="mod">
-          <ac:chgData name="Renan Xavier Cortes" userId="d6af805853004405" providerId="LiveId" clId="{950B5AFF-F132-4192-98BF-4A1EDF544CA7}" dt="2026-01-29T19:59:17.396" v="409" actId="1076"/>
-          <ac:spMkLst>
-            <pc:docMk/>
-            <pc:sldMk cId="1265083167" sldId="289"/>
-            <ac:spMk id="14" creationId="{427DBFEB-81BF-4CC3-A411-FBF43D295C56}"/>
-          </ac:spMkLst>
-        </pc:spChg>
-      </pc:sldChg>
-      <pc:sldChg chg="addSp delSp modSp mod">
-        <pc:chgData name="Renan Xavier Cortes" userId="d6af805853004405" providerId="LiveId" clId="{950B5AFF-F132-4192-98BF-4A1EDF544CA7}" dt="2026-01-30T13:22:54.960" v="498" actId="20577"/>
-        <pc:sldMkLst>
-          <pc:docMk/>
-          <pc:sldMk cId="1984859878" sldId="290"/>
-        </pc:sldMkLst>
-        <pc:spChg chg="add mod">
-          <ac:chgData name="Renan Xavier Cortes" userId="d6af805853004405" providerId="LiveId" clId="{950B5AFF-F132-4192-98BF-4A1EDF544CA7}" dt="2026-01-29T19:49:26.048" v="261"/>
-          <ac:spMkLst>
-            <pc:docMk/>
-            <pc:sldMk cId="1984859878" sldId="290"/>
-            <ac:spMk id="4" creationId="{E61D9E72-5945-E4E8-8FAD-063AD6F2E0E0}"/>
-          </ac:spMkLst>
-        </pc:spChg>
-        <pc:spChg chg="del">
-          <ac:chgData name="Renan Xavier Cortes" userId="d6af805853004405" providerId="LiveId" clId="{950B5AFF-F132-4192-98BF-4A1EDF544CA7}" dt="2026-01-29T19:49:25.721" v="260" actId="478"/>
-          <ac:spMkLst>
-            <pc:docMk/>
-            <pc:sldMk cId="1984859878" sldId="290"/>
-            <ac:spMk id="8" creationId="{39AE06C5-34BE-4D68-97C3-4C07702C2DF6}"/>
-          </ac:spMkLst>
-        </pc:spChg>
-        <pc:spChg chg="mod">
-          <ac:chgData name="Renan Xavier Cortes" userId="d6af805853004405" providerId="LiveId" clId="{950B5AFF-F132-4192-98BF-4A1EDF544CA7}" dt="2026-01-30T13:22:54.960" v="498" actId="20577"/>
-          <ac:spMkLst>
-            <pc:docMk/>
-            <pc:sldMk cId="1984859878" sldId="290"/>
-            <ac:spMk id="14" creationId="{427DBFEB-81BF-4CC3-A411-FBF43D295C56}"/>
-          </ac:spMkLst>
-        </pc:spChg>
-      </pc:sldChg>
-      <pc:sldChg chg="addSp delSp modSp mod">
-        <pc:chgData name="Renan Xavier Cortes" userId="d6af805853004405" providerId="LiveId" clId="{950B5AFF-F132-4192-98BF-4A1EDF544CA7}" dt="2026-01-30T13:23:17.567" v="500" actId="20577"/>
-        <pc:sldMkLst>
-          <pc:docMk/>
-          <pc:sldMk cId="3980882677" sldId="291"/>
-        </pc:sldMkLst>
-        <pc:spChg chg="add mod">
-          <ac:chgData name="Renan Xavier Cortes" userId="d6af805853004405" providerId="LiveId" clId="{950B5AFF-F132-4192-98BF-4A1EDF544CA7}" dt="2026-01-29T19:49:53.744" v="309"/>
-          <ac:spMkLst>
-            <pc:docMk/>
-            <pc:sldMk cId="3980882677" sldId="291"/>
-            <ac:spMk id="4" creationId="{40941CD3-6E8A-4C03-5BC0-DC70D9A8E986}"/>
-          </ac:spMkLst>
-        </pc:spChg>
-        <pc:spChg chg="del">
-          <ac:chgData name="Renan Xavier Cortes" userId="d6af805853004405" providerId="LiveId" clId="{950B5AFF-F132-4192-98BF-4A1EDF544CA7}" dt="2026-01-29T19:49:52.776" v="308" actId="478"/>
-          <ac:spMkLst>
-            <pc:docMk/>
-            <pc:sldMk cId="3980882677" sldId="291"/>
-            <ac:spMk id="8" creationId="{39AE06C5-34BE-4D68-97C3-4C07702C2DF6}"/>
-          </ac:spMkLst>
-        </pc:spChg>
-        <pc:spChg chg="mod">
-          <ac:chgData name="Renan Xavier Cortes" userId="d6af805853004405" providerId="LiveId" clId="{950B5AFF-F132-4192-98BF-4A1EDF544CA7}" dt="2026-01-30T13:23:17.567" v="500" actId="20577"/>
-          <ac:spMkLst>
-            <pc:docMk/>
-            <pc:sldMk cId="3980882677" sldId="291"/>
             <ac:spMk id="14" creationId="{427DBFEB-81BF-4CC3-A411-FBF43D295C56}"/>
           </ac:spMkLst>
         </pc:spChg>
@@ -1827,6 +1742,169 @@
       </pc:sldChg>
     </pc:docChg>
   </pc:docChgLst>
+  <pc:docChgLst>
+    <pc:chgData name="Renan Xavier Cortes" userId="d6af805853004405" providerId="LiveId" clId="{950B5AFF-F132-4192-98BF-4A1EDF544CA7}"/>
+    <pc:docChg chg="undo custSel modSld">
+      <pc:chgData name="Renan Xavier Cortes" userId="d6af805853004405" providerId="LiveId" clId="{950B5AFF-F132-4192-98BF-4A1EDF544CA7}" dt="2026-01-30T13:23:17.567" v="500" actId="20577"/>
+      <pc:docMkLst>
+        <pc:docMk/>
+      </pc:docMkLst>
+      <pc:sldChg chg="modSp mod">
+        <pc:chgData name="Renan Xavier Cortes" userId="d6af805853004405" providerId="LiveId" clId="{950B5AFF-F132-4192-98BF-4A1EDF544CA7}" dt="2026-01-29T19:44:12.067" v="25" actId="20577"/>
+        <pc:sldMkLst>
+          <pc:docMk/>
+          <pc:sldMk cId="193773268" sldId="256"/>
+        </pc:sldMkLst>
+        <pc:spChg chg="mod">
+          <ac:chgData name="Renan Xavier Cortes" userId="d6af805853004405" providerId="LiveId" clId="{950B5AFF-F132-4192-98BF-4A1EDF544CA7}" dt="2026-01-29T19:44:12.067" v="25" actId="20577"/>
+          <ac:spMkLst>
+            <pc:docMk/>
+            <pc:sldMk cId="193773268" sldId="256"/>
+            <ac:spMk id="2" creationId="{F46BAB02-4578-42EC-A9FB-F4446897095D}"/>
+          </ac:spMkLst>
+        </pc:spChg>
+      </pc:sldChg>
+      <pc:sldChg chg="modSp mod">
+        <pc:chgData name="Renan Xavier Cortes" userId="d6af805853004405" providerId="LiveId" clId="{950B5AFF-F132-4192-98BF-4A1EDF544CA7}" dt="2026-01-29T19:47:00.124" v="172" actId="20577"/>
+        <pc:sldMkLst>
+          <pc:docMk/>
+          <pc:sldMk cId="1859719164" sldId="259"/>
+        </pc:sldMkLst>
+        <pc:spChg chg="mod">
+          <ac:chgData name="Renan Xavier Cortes" userId="d6af805853004405" providerId="LiveId" clId="{950B5AFF-F132-4192-98BF-4A1EDF544CA7}" dt="2026-01-29T19:44:54.572" v="60" actId="20577"/>
+          <ac:spMkLst>
+            <pc:docMk/>
+            <pc:sldMk cId="1859719164" sldId="259"/>
+            <ac:spMk id="8" creationId="{39AE06C5-34BE-4D68-97C3-4C07702C2DF6}"/>
+          </ac:spMkLst>
+        </pc:spChg>
+        <pc:spChg chg="mod">
+          <ac:chgData name="Renan Xavier Cortes" userId="d6af805853004405" providerId="LiveId" clId="{950B5AFF-F132-4192-98BF-4A1EDF544CA7}" dt="2026-01-29T19:47:00.124" v="172" actId="20577"/>
+          <ac:spMkLst>
+            <pc:docMk/>
+            <pc:sldMk cId="1859719164" sldId="259"/>
+            <ac:spMk id="14" creationId="{427DBFEB-81BF-4CC3-A411-FBF43D295C56}"/>
+          </ac:spMkLst>
+        </pc:spChg>
+      </pc:sldChg>
+      <pc:sldChg chg="addSp delSp modSp mod">
+        <pc:chgData name="Renan Xavier Cortes" userId="d6af805853004405" providerId="LiveId" clId="{950B5AFF-F132-4192-98BF-4A1EDF544CA7}" dt="2026-01-29T19:47:47.607" v="174"/>
+        <pc:sldMkLst>
+          <pc:docMk/>
+          <pc:sldMk cId="1152571280" sldId="288"/>
+        </pc:sldMkLst>
+        <pc:spChg chg="add mod">
+          <ac:chgData name="Renan Xavier Cortes" userId="d6af805853004405" providerId="LiveId" clId="{950B5AFF-F132-4192-98BF-4A1EDF544CA7}" dt="2026-01-29T19:47:47.607" v="174"/>
+          <ac:spMkLst>
+            <pc:docMk/>
+            <pc:sldMk cId="1152571280" sldId="288"/>
+            <ac:spMk id="4" creationId="{03AAB837-2F12-2CBA-1DBC-3BC1614B82E6}"/>
+          </ac:spMkLst>
+        </pc:spChg>
+        <pc:spChg chg="del">
+          <ac:chgData name="Renan Xavier Cortes" userId="d6af805853004405" providerId="LiveId" clId="{950B5AFF-F132-4192-98BF-4A1EDF544CA7}" dt="2026-01-29T19:47:46.967" v="173" actId="478"/>
+          <ac:spMkLst>
+            <pc:docMk/>
+            <pc:sldMk cId="1152571280" sldId="288"/>
+            <ac:spMk id="8" creationId="{39AE06C5-34BE-4D68-97C3-4C07702C2DF6}"/>
+          </ac:spMkLst>
+        </pc:spChg>
+      </pc:sldChg>
+      <pc:sldChg chg="addSp delSp modSp mod">
+        <pc:chgData name="Renan Xavier Cortes" userId="d6af805853004405" providerId="LiveId" clId="{950B5AFF-F132-4192-98BF-4A1EDF544CA7}" dt="2026-01-29T19:59:17.396" v="409" actId="1076"/>
+        <pc:sldMkLst>
+          <pc:docMk/>
+          <pc:sldMk cId="1265083167" sldId="289"/>
+        </pc:sldMkLst>
+        <pc:spChg chg="add mod">
+          <ac:chgData name="Renan Xavier Cortes" userId="d6af805853004405" providerId="LiveId" clId="{950B5AFF-F132-4192-98BF-4A1EDF544CA7}" dt="2026-01-29T19:47:57.275" v="176"/>
+          <ac:spMkLst>
+            <pc:docMk/>
+            <pc:sldMk cId="1265083167" sldId="289"/>
+            <ac:spMk id="4" creationId="{BA4993BB-961F-3B68-9972-1610281ECC90}"/>
+          </ac:spMkLst>
+        </pc:spChg>
+        <pc:spChg chg="del">
+          <ac:chgData name="Renan Xavier Cortes" userId="d6af805853004405" providerId="LiveId" clId="{950B5AFF-F132-4192-98BF-4A1EDF544CA7}" dt="2026-01-29T19:47:56.666" v="175" actId="478"/>
+          <ac:spMkLst>
+            <pc:docMk/>
+            <pc:sldMk cId="1265083167" sldId="289"/>
+            <ac:spMk id="8" creationId="{39AE06C5-34BE-4D68-97C3-4C07702C2DF6}"/>
+          </ac:spMkLst>
+        </pc:spChg>
+        <pc:spChg chg="mod">
+          <ac:chgData name="Renan Xavier Cortes" userId="d6af805853004405" providerId="LiveId" clId="{950B5AFF-F132-4192-98BF-4A1EDF544CA7}" dt="2026-01-29T19:59:17.396" v="409" actId="1076"/>
+          <ac:spMkLst>
+            <pc:docMk/>
+            <pc:sldMk cId="1265083167" sldId="289"/>
+            <ac:spMk id="14" creationId="{427DBFEB-81BF-4CC3-A411-FBF43D295C56}"/>
+          </ac:spMkLst>
+        </pc:spChg>
+      </pc:sldChg>
+      <pc:sldChg chg="addSp delSp modSp mod">
+        <pc:chgData name="Renan Xavier Cortes" userId="d6af805853004405" providerId="LiveId" clId="{950B5AFF-F132-4192-98BF-4A1EDF544CA7}" dt="2026-01-30T13:22:54.960" v="498" actId="20577"/>
+        <pc:sldMkLst>
+          <pc:docMk/>
+          <pc:sldMk cId="1984859878" sldId="290"/>
+        </pc:sldMkLst>
+        <pc:spChg chg="add mod">
+          <ac:chgData name="Renan Xavier Cortes" userId="d6af805853004405" providerId="LiveId" clId="{950B5AFF-F132-4192-98BF-4A1EDF544CA7}" dt="2026-01-29T19:49:26.048" v="261"/>
+          <ac:spMkLst>
+            <pc:docMk/>
+            <pc:sldMk cId="1984859878" sldId="290"/>
+            <ac:spMk id="4" creationId="{E61D9E72-5945-E4E8-8FAD-063AD6F2E0E0}"/>
+          </ac:spMkLst>
+        </pc:spChg>
+        <pc:spChg chg="del">
+          <ac:chgData name="Renan Xavier Cortes" userId="d6af805853004405" providerId="LiveId" clId="{950B5AFF-F132-4192-98BF-4A1EDF544CA7}" dt="2026-01-29T19:49:25.721" v="260" actId="478"/>
+          <ac:spMkLst>
+            <pc:docMk/>
+            <pc:sldMk cId="1984859878" sldId="290"/>
+            <ac:spMk id="8" creationId="{39AE06C5-34BE-4D68-97C3-4C07702C2DF6}"/>
+          </ac:spMkLst>
+        </pc:spChg>
+        <pc:spChg chg="mod">
+          <ac:chgData name="Renan Xavier Cortes" userId="d6af805853004405" providerId="LiveId" clId="{950B5AFF-F132-4192-98BF-4A1EDF544CA7}" dt="2026-01-30T13:22:54.960" v="498" actId="20577"/>
+          <ac:spMkLst>
+            <pc:docMk/>
+            <pc:sldMk cId="1984859878" sldId="290"/>
+            <ac:spMk id="14" creationId="{427DBFEB-81BF-4CC3-A411-FBF43D295C56}"/>
+          </ac:spMkLst>
+        </pc:spChg>
+      </pc:sldChg>
+      <pc:sldChg chg="addSp delSp modSp mod">
+        <pc:chgData name="Renan Xavier Cortes" userId="d6af805853004405" providerId="LiveId" clId="{950B5AFF-F132-4192-98BF-4A1EDF544CA7}" dt="2026-01-30T13:23:17.567" v="500" actId="20577"/>
+        <pc:sldMkLst>
+          <pc:docMk/>
+          <pc:sldMk cId="3980882677" sldId="291"/>
+        </pc:sldMkLst>
+        <pc:spChg chg="add mod">
+          <ac:chgData name="Renan Xavier Cortes" userId="d6af805853004405" providerId="LiveId" clId="{950B5AFF-F132-4192-98BF-4A1EDF544CA7}" dt="2026-01-29T19:49:53.744" v="309"/>
+          <ac:spMkLst>
+            <pc:docMk/>
+            <pc:sldMk cId="3980882677" sldId="291"/>
+            <ac:spMk id="4" creationId="{40941CD3-6E8A-4C03-5BC0-DC70D9A8E986}"/>
+          </ac:spMkLst>
+        </pc:spChg>
+        <pc:spChg chg="del">
+          <ac:chgData name="Renan Xavier Cortes" userId="d6af805853004405" providerId="LiveId" clId="{950B5AFF-F132-4192-98BF-4A1EDF544CA7}" dt="2026-01-29T19:49:52.776" v="308" actId="478"/>
+          <ac:spMkLst>
+            <pc:docMk/>
+            <pc:sldMk cId="3980882677" sldId="291"/>
+            <ac:spMk id="8" creationId="{39AE06C5-34BE-4D68-97C3-4C07702C2DF6}"/>
+          </ac:spMkLst>
+        </pc:spChg>
+        <pc:spChg chg="mod">
+          <ac:chgData name="Renan Xavier Cortes" userId="d6af805853004405" providerId="LiveId" clId="{950B5AFF-F132-4192-98BF-4A1EDF544CA7}" dt="2026-01-30T13:23:17.567" v="500" actId="20577"/>
+          <ac:spMkLst>
+            <pc:docMk/>
+            <pc:sldMk cId="3980882677" sldId="291"/>
+            <ac:spMk id="14" creationId="{427DBFEB-81BF-4CC3-A411-FBF43D295C56}"/>
+          </ac:spMkLst>
+        </pc:spChg>
+      </pc:sldChg>
+    </pc:docChg>
+  </pc:docChgLst>
 </pc:chgInfo>
 </file>
 
@@ -1912,7 +1990,7 @@
           <a:p>
             <a:fld id="{9B3F8303-3E6A-4B9A-B114-90BC24763552}" type="datetimeFigureOut">
               <a:rPr lang="pt-BR" smtClean="0"/>
-              <a:t>29/01/2026</a:t>
+              <a:t>30/07/2026</a:t>
             </a:fld>
             <a:endParaRPr lang="pt-BR"/>
           </a:p>
@@ -2746,7 +2824,7 @@
           <a:p>
             <a:fld id="{6D1CE400-4242-4B09-9036-D13CC6199FDE}" type="datetimeFigureOut">
               <a:rPr lang="pt-BR" smtClean="0"/>
-              <a:t>29/01/2026</a:t>
+              <a:t>30/07/2026</a:t>
             </a:fld>
             <a:endParaRPr lang="pt-BR"/>
           </a:p>
@@ -2944,7 +3022,7 @@
           <a:p>
             <a:fld id="{6D1CE400-4242-4B09-9036-D13CC6199FDE}" type="datetimeFigureOut">
               <a:rPr lang="pt-BR" smtClean="0"/>
-              <a:t>29/01/2026</a:t>
+              <a:t>30/07/2026</a:t>
             </a:fld>
             <a:endParaRPr lang="pt-BR"/>
           </a:p>
@@ -3152,7 +3230,7 @@
           <a:p>
             <a:fld id="{6D1CE400-4242-4B09-9036-D13CC6199FDE}" type="datetimeFigureOut">
               <a:rPr lang="pt-BR" smtClean="0"/>
-              <a:t>29/01/2026</a:t>
+              <a:t>30/07/2026</a:t>
             </a:fld>
             <a:endParaRPr lang="pt-BR"/>
           </a:p>
@@ -3350,7 +3428,7 @@
           <a:p>
             <a:fld id="{6D1CE400-4242-4B09-9036-D13CC6199FDE}" type="datetimeFigureOut">
               <a:rPr lang="pt-BR" smtClean="0"/>
-              <a:t>29/01/2026</a:t>
+              <a:t>30/07/2026</a:t>
             </a:fld>
             <a:endParaRPr lang="pt-BR"/>
           </a:p>
@@ -3625,7 +3703,7 @@
           <a:p>
             <a:fld id="{6D1CE400-4242-4B09-9036-D13CC6199FDE}" type="datetimeFigureOut">
               <a:rPr lang="pt-BR" smtClean="0"/>
-              <a:t>29/01/2026</a:t>
+              <a:t>30/07/2026</a:t>
             </a:fld>
             <a:endParaRPr lang="pt-BR"/>
           </a:p>
@@ -3890,7 +3968,7 @@
           <a:p>
             <a:fld id="{6D1CE400-4242-4B09-9036-D13CC6199FDE}" type="datetimeFigureOut">
               <a:rPr lang="pt-BR" smtClean="0"/>
-              <a:t>29/01/2026</a:t>
+              <a:t>30/07/2026</a:t>
             </a:fld>
             <a:endParaRPr lang="pt-BR"/>
           </a:p>
@@ -4302,7 +4380,7 @@
           <a:p>
             <a:fld id="{6D1CE400-4242-4B09-9036-D13CC6199FDE}" type="datetimeFigureOut">
               <a:rPr lang="pt-BR" smtClean="0"/>
-              <a:t>29/01/2026</a:t>
+              <a:t>30/07/2026</a:t>
             </a:fld>
             <a:endParaRPr lang="pt-BR"/>
           </a:p>
@@ -4443,7 +4521,7 @@
           <a:p>
             <a:fld id="{6D1CE400-4242-4B09-9036-D13CC6199FDE}" type="datetimeFigureOut">
               <a:rPr lang="pt-BR" smtClean="0"/>
-              <a:t>29/01/2026</a:t>
+              <a:t>30/07/2026</a:t>
             </a:fld>
             <a:endParaRPr lang="pt-BR"/>
           </a:p>
@@ -4556,7 +4634,7 @@
           <a:p>
             <a:fld id="{6D1CE400-4242-4B09-9036-D13CC6199FDE}" type="datetimeFigureOut">
               <a:rPr lang="pt-BR" smtClean="0"/>
-              <a:t>29/01/2026</a:t>
+              <a:t>30/07/2026</a:t>
             </a:fld>
             <a:endParaRPr lang="pt-BR"/>
           </a:p>
@@ -4867,7 +4945,7 @@
           <a:p>
             <a:fld id="{6D1CE400-4242-4B09-9036-D13CC6199FDE}" type="datetimeFigureOut">
               <a:rPr lang="pt-BR" smtClean="0"/>
-              <a:t>29/01/2026</a:t>
+              <a:t>30/07/2026</a:t>
             </a:fld>
             <a:endParaRPr lang="pt-BR"/>
           </a:p>
@@ -5155,7 +5233,7 @@
           <a:p>
             <a:fld id="{6D1CE400-4242-4B09-9036-D13CC6199FDE}" type="datetimeFigureOut">
               <a:rPr lang="pt-BR" smtClean="0"/>
-              <a:t>29/01/2026</a:t>
+              <a:t>30/07/2026</a:t>
             </a:fld>
             <a:endParaRPr lang="pt-BR"/>
           </a:p>
@@ -5399,7 +5477,7 @@
           <a:p>
             <a:fld id="{6D1CE400-4242-4B09-9036-D13CC6199FDE}" type="datetimeFigureOut">
               <a:rPr lang="pt-BR" smtClean="0"/>
-              <a:t>29/01/2026</a:t>
+              <a:t>30/07/2026</a:t>
             </a:fld>
             <a:endParaRPr lang="pt-BR"/>
           </a:p>
@@ -6167,8 +6245,8 @@
         </p:nvSpPr>
         <p:spPr>
           <a:xfrm>
-            <a:off x="940904" y="1669700"/>
-            <a:ext cx="10310191" cy="4217629"/>
+            <a:off x="0" y="1559985"/>
+            <a:ext cx="11935326" cy="4176143"/>
           </a:xfrm>
           <a:prstGeom prst="rect">
             <a:avLst/>
@@ -6190,7 +6268,7 @@
               </a:spcAft>
             </a:pPr>
             <a:r>
-              <a:rPr lang="pt-BR" sz="3600" b="1" dirty="0"/>
+              <a:rPr lang="pt-BR" sz="3200" b="1" dirty="0"/>
               <a:t>Sejam muito bem-vindos e bem-vindas à disciplina de Métodos Estatísticos!</a:t>
             </a:r>
           </a:p>
@@ -6203,7 +6281,11 @@
                 <a:spcPts val="110"/>
               </a:spcAft>
             </a:pPr>
-            <a:endParaRPr lang="pt-BR" sz="2000" b="1" dirty="0"/>
+            <a:r>
+              <a:rPr lang="pt-BR" sz="3200" b="1"/>
+              <a:t>Turma A1</a:t>
+            </a:r>
+            <a:endParaRPr lang="pt-BR" sz="3200" b="1" dirty="0"/>
           </a:p>
           <a:p>
             <a:pPr algn="ctr">
@@ -6214,10 +6296,7 @@
                 <a:spcPts val="110"/>
               </a:spcAft>
             </a:pPr>
-            <a:r>
-              <a:rPr lang="pt-BR" sz="3600" b="1" dirty="0"/>
-              <a:t>Aulas das 15:30 às 17:10 nas terças e quintas</a:t>
-            </a:r>
+            <a:endParaRPr lang="pt-BR" b="1" dirty="0"/>
           </a:p>
           <a:p>
             <a:pPr algn="ctr">
@@ -6229,24 +6308,8 @@
               </a:spcAft>
             </a:pPr>
             <a:r>
-              <a:rPr lang="pt-BR" sz="3600" b="1" dirty="0"/>
-              <a:t>Local: Sala </a:t>
-            </a:r>
-            <a:r>
-              <a:rPr lang="pt-BR" sz="3600" b="1" dirty="0" err="1"/>
-              <a:t>xx</a:t>
-            </a:r>
-            <a:r>
-              <a:rPr lang="pt-BR" sz="3600" b="1" dirty="0"/>
-              <a:t> do Prédio </a:t>
-            </a:r>
-            <a:r>
-              <a:rPr lang="pt-BR" sz="3600" b="1" dirty="0" err="1"/>
-              <a:t>yy</a:t>
-            </a:r>
-            <a:r>
-              <a:rPr lang="pt-BR" sz="3600" b="1" dirty="0"/>
-              <a:t> do Campus da Agronomia</a:t>
+              <a:rPr lang="pt-BR" sz="3200" b="1" dirty="0"/>
+              <a:t>Aulas das 07:30 às 09:10 nas segundas e sextas</a:t>
             </a:r>
           </a:p>
           <a:p>
@@ -6259,16 +6322,10 @@
               </a:spcAft>
             </a:pPr>
             <a:r>
-              <a:rPr lang="pt-BR" sz="1400" b="1" i="1" dirty="0">
-                <a:solidFill>
-                  <a:srgbClr val="767676"/>
-                </a:solidFill>
-                <a:effectLst/>
-                <a:latin typeface="Arial" panose="020B0604020202020204" pitchFamily="34" charset="0"/>
-              </a:rPr>
-              <a:t>Av. Bento Gonçalves n° 7712 Bairro Agronomia, Porto Alegre</a:t>
-            </a:r>
-            <a:endParaRPr lang="pt-BR" sz="1400" b="1" i="1" dirty="0"/>
+              <a:rPr lang="pt-BR" sz="3200" b="1" dirty="0"/>
+              <a:t>Local: Faculdade de Agronomia - Prédio Central</a:t>
+            </a:r>
+            <a:endParaRPr lang="pt-BR" sz="1200" b="1" i="1" dirty="0"/>
           </a:p>
         </p:txBody>
       </p:sp>
@@ -6505,7 +6562,7 @@
               <a:rPr lang="pt-BR" sz="3600" b="1" dirty="0">
                 <a:hlinkClick r:id="rId3"/>
               </a:rPr>
-              <a:t>renan...@ufrgs.br</a:t>
+              <a:t>renan.cortes@ufrgs.br</a:t>
             </a:r>
             <a:endParaRPr lang="pt-BR" sz="3600" b="1" dirty="0"/>
           </a:p>
@@ -6755,8 +6812,8 @@
         </p:nvSpPr>
         <p:spPr>
           <a:xfrm>
-            <a:off x="757763" y="1547396"/>
-            <a:ext cx="10676473" cy="3954801"/>
+            <a:off x="493806" y="1680983"/>
+            <a:ext cx="11204388" cy="3954801"/>
           </a:xfrm>
           <a:prstGeom prst="rect">
             <a:avLst/>
@@ -6839,15 +6896,7 @@
             </a:pPr>
             <a:r>
               <a:rPr lang="pt-BR" sz="2800" b="1" dirty="0"/>
-              <a:t>Material será ancorado nas bibliografias do Plano de Ensino e material de semestres anteriores (Prof. Márcio </a:t>
-            </a:r>
-            <a:r>
-              <a:rPr lang="pt-BR" sz="2800" b="1" dirty="0" err="1"/>
-              <a:t>Valk</a:t>
-            </a:r>
-            <a:r>
-              <a:rPr lang="pt-BR" sz="2800" b="1" dirty="0"/>
-              <a:t>, João Feliz, etc.)</a:t>
+              <a:t>Material será ancorado nas bibliografias do Plano de Ensino e material de semestres anteriores e de disciplinas relacionadas</a:t>
             </a:r>
           </a:p>
         </p:txBody>
@@ -7083,7 +7132,7 @@
         <p:spPr>
           <a:xfrm>
             <a:off x="940904" y="1100077"/>
-            <a:ext cx="10310191" cy="5557547"/>
+            <a:ext cx="10310191" cy="5680786"/>
           </a:xfrm>
           <a:prstGeom prst="rect">
             <a:avLst/>
@@ -7105,8 +7154,8 @@
               </a:spcAft>
             </a:pPr>
             <a:r>
-              <a:rPr lang="pt-BR" sz="1200" b="1" dirty="0"/>
-              <a:t>Os critérios de avaliação dessa disciplina em 2026/1 incluirão a realização das seguintes tarefas, com os referidos pesos:</a:t>
+              <a:rPr lang="pt-BR" sz="1300" b="1" dirty="0"/>
+              <a:t>Os critérios de avaliação dessa disciplina incluirão a realização das seguintes tarefas, com os referidos pesos:</a:t>
             </a:r>
           </a:p>
           <a:p>
@@ -7119,8 +7168,8 @@
               </a:spcAft>
             </a:pPr>
             <a:r>
-              <a:rPr lang="pt-BR" sz="1200" b="1" dirty="0"/>
-              <a:t>- DUAS PROVAS - PESO 0,7</a:t>
+              <a:rPr lang="pt-BR" sz="1300" b="1" dirty="0"/>
+              <a:t>- PROVA 1 - PESO 1/3</a:t>
             </a:r>
           </a:p>
           <a:p>
@@ -7133,8 +7182,8 @@
               </a:spcAft>
             </a:pPr>
             <a:r>
-              <a:rPr lang="pt-BR" sz="1200" b="1" dirty="0"/>
-              <a:t>- TRABALHO (Atividade autônoma) - PESO 0,3</a:t>
+              <a:rPr lang="pt-BR" sz="1300" b="1" dirty="0"/>
+              <a:t>- PROVA 2 - PESO 1/3</a:t>
             </a:r>
           </a:p>
           <a:p>
@@ -7146,7 +7195,10 @@
                 <a:spcPts val="110"/>
               </a:spcAft>
             </a:pPr>
-            <a:endParaRPr lang="pt-BR" sz="1200" b="1" dirty="0"/>
+            <a:r>
+              <a:rPr lang="pt-BR" sz="1300" b="1" dirty="0"/>
+              <a:t>- PROVA 3 - PESO 1/3</a:t>
+            </a:r>
           </a:p>
           <a:p>
             <a:pPr>
@@ -7157,10 +7209,7 @@
                 <a:spcPts val="110"/>
               </a:spcAft>
             </a:pPr>
-            <a:r>
-              <a:rPr lang="pt-BR" sz="1200" b="1" dirty="0"/>
-              <a:t>DATAS DAS PROVAS</a:t>
-            </a:r>
+            <a:endParaRPr lang="pt-BR" sz="1300" b="1" dirty="0"/>
           </a:p>
           <a:p>
             <a:pPr>
@@ -7172,16 +7221,8 @@
               </a:spcAft>
             </a:pPr>
             <a:r>
-              <a:rPr lang="pt-BR" sz="1200" b="1" dirty="0"/>
-              <a:t>PROVA 1: </a:t>
-            </a:r>
-            <a:r>
-              <a:rPr lang="pt-BR" sz="1200" b="1" dirty="0">
-                <a:solidFill>
-                  <a:srgbClr val="FF0000"/>
-                </a:solidFill>
-              </a:rPr>
-              <a:t>09/04/2026</a:t>
+              <a:rPr lang="pt-BR" sz="1300" b="1" dirty="0"/>
+              <a:t>DATAS DAS PROVAS</a:t>
             </a:r>
           </a:p>
           <a:p>
@@ -7194,16 +7235,16 @@
               </a:spcAft>
             </a:pPr>
             <a:r>
-              <a:rPr lang="pt-BR" sz="1200" b="1" dirty="0"/>
-              <a:t>PROVA 2: </a:t>
-            </a:r>
-            <a:r>
-              <a:rPr lang="pt-BR" sz="1200" b="1" dirty="0">
+              <a:rPr lang="pt-BR" sz="1300" b="1" dirty="0"/>
+              <a:t>PROVA 1: </a:t>
+            </a:r>
+            <a:r>
+              <a:rPr lang="pt-BR" sz="1300" b="1" dirty="0">
                 <a:solidFill>
                   <a:srgbClr val="FF0000"/>
                 </a:solidFill>
               </a:rPr>
-              <a:t>26/05/2026</a:t>
+              <a:t>21/09/2026</a:t>
             </a:r>
           </a:p>
           <a:p>
@@ -7215,11 +7256,18 @@
                 <a:spcPts val="110"/>
               </a:spcAft>
             </a:pPr>
-            <a:endParaRPr lang="pt-BR" sz="1200" b="1" dirty="0">
-              <a:solidFill>
-                <a:srgbClr val="FF0000"/>
-              </a:solidFill>
-            </a:endParaRPr>
+            <a:r>
+              <a:rPr lang="pt-BR" sz="1300" b="1" dirty="0"/>
+              <a:t>PROVA 2: </a:t>
+            </a:r>
+            <a:r>
+              <a:rPr lang="pt-BR" sz="1300" b="1" dirty="0">
+                <a:solidFill>
+                  <a:srgbClr val="FF0000"/>
+                </a:solidFill>
+              </a:rPr>
+              <a:t>30/10/2026</a:t>
+            </a:r>
           </a:p>
           <a:p>
             <a:pPr>
@@ -7231,16 +7279,16 @@
               </a:spcAft>
             </a:pPr>
             <a:r>
-              <a:rPr lang="pt-BR" sz="1200" b="1" dirty="0"/>
-              <a:t>APRESENTAÇÃO DA ATIVIDADE AUTÔNOMA: </a:t>
-            </a:r>
-            <a:r>
-              <a:rPr lang="pt-BR" sz="1200" b="1" dirty="0">
+              <a:rPr lang="pt-BR" sz="1300" b="1" dirty="0"/>
+              <a:t>PROVA 3: </a:t>
+            </a:r>
+            <a:r>
+              <a:rPr lang="pt-BR" sz="1300" b="1" dirty="0">
                 <a:solidFill>
                   <a:srgbClr val="FF0000"/>
                 </a:solidFill>
               </a:rPr>
-              <a:t>02/07/2026</a:t>
+              <a:t>07/12/2026</a:t>
             </a:r>
           </a:p>
           <a:p>
@@ -7252,7 +7300,7 @@
                 <a:spcPts val="110"/>
               </a:spcAft>
             </a:pPr>
-            <a:endParaRPr lang="pt-BR" sz="1200" b="1" dirty="0"/>
+            <a:endParaRPr lang="pt-BR" sz="1300" b="1" dirty="0"/>
           </a:p>
           <a:p>
             <a:pPr>
@@ -7264,8 +7312,8 @@
               </a:spcAft>
             </a:pPr>
             <a:r>
-              <a:rPr lang="pt-BR" sz="1200" b="1" dirty="0"/>
-              <a:t>A Média Final (MF) será calculada da seguinte forma: </a:t>
+              <a:rPr lang="pt-BR" sz="1300" b="1" dirty="0"/>
+              <a:t>A Média Final (MF) será calculada como a média aritmética da nota das três provas.</a:t>
             </a:r>
           </a:p>
           <a:p>
@@ -7277,10 +7325,7 @@
                 <a:spcPts val="110"/>
               </a:spcAft>
             </a:pPr>
-            <a:r>
-              <a:rPr lang="pt-BR" sz="1200" b="1" dirty="0"/>
-              <a:t>MF = (0,3*nota atividade autônoma) + (0,7*média das duas provas)</a:t>
-            </a:r>
+            <a:endParaRPr lang="pt-BR" sz="1300" b="1" dirty="0"/>
           </a:p>
           <a:p>
             <a:pPr>
@@ -7291,7 +7336,10 @@
                 <a:spcPts val="110"/>
               </a:spcAft>
             </a:pPr>
-            <a:endParaRPr lang="pt-BR" sz="1200" b="1" dirty="0"/>
+            <a:r>
+              <a:rPr lang="pt-BR" sz="1300" b="1" dirty="0"/>
+              <a:t>O conceito final será atribuído da seguinte maneira:</a:t>
+            </a:r>
           </a:p>
           <a:p>
             <a:pPr>
@@ -7303,8 +7351,8 @@
               </a:spcAft>
             </a:pPr>
             <a:r>
-              <a:rPr lang="pt-BR" sz="1200" b="1" dirty="0"/>
-              <a:t>O conceito final será atribuído da seguinte maneira:</a:t>
+              <a:rPr lang="pt-BR" sz="1300" b="1" dirty="0"/>
+              <a:t>Conceito A para MF maior ou igual a 9,0.</a:t>
             </a:r>
           </a:p>
           <a:p>
@@ -7317,8 +7365,8 @@
               </a:spcAft>
             </a:pPr>
             <a:r>
-              <a:rPr lang="pt-BR" sz="1200" b="1" dirty="0"/>
-              <a:t>Conceito A para MF maior ou igual a 9,0.</a:t>
+              <a:rPr lang="pt-BR" sz="1300" b="1" dirty="0"/>
+              <a:t>Conceito B para MF maior ou igual a 7,5 e menor do que 9,0.</a:t>
             </a:r>
           </a:p>
           <a:p>
@@ -7331,8 +7379,8 @@
               </a:spcAft>
             </a:pPr>
             <a:r>
-              <a:rPr lang="pt-BR" sz="1200" b="1" dirty="0"/>
-              <a:t>Conceito B para MF maior ou igual a 7,5 e menor do que 9,0.</a:t>
+              <a:rPr lang="pt-BR" sz="1300" b="1" dirty="0"/>
+              <a:t>Conceito C para MF maior ou igual a 6,0 e menor do que 7,5.</a:t>
             </a:r>
           </a:p>
           <a:p>
@@ -7345,8 +7393,8 @@
               </a:spcAft>
             </a:pPr>
             <a:r>
-              <a:rPr lang="pt-BR" sz="1200" b="1" dirty="0"/>
-              <a:t>Conceito C para MF maior ou igual a 6,0 e menor do que 7,5.</a:t>
+              <a:rPr lang="pt-BR" sz="1300" b="1" dirty="0"/>
+              <a:t>Conceito D para MF menor do que 6,0.</a:t>
             </a:r>
           </a:p>
           <a:p>
@@ -7359,21 +7407,7 @@
               </a:spcAft>
             </a:pPr>
             <a:r>
-              <a:rPr lang="pt-BR" sz="1200" b="1" dirty="0"/>
-              <a:t>Conceito D para MF menor do que 6,0.</a:t>
-            </a:r>
-          </a:p>
-          <a:p>
-            <a:pPr>
-              <a:lnSpc>
-                <a:spcPct val="150000"/>
-              </a:lnSpc>
-              <a:spcAft>
-                <a:spcPts val="110"/>
-              </a:spcAft>
-            </a:pPr>
-            <a:r>
-              <a:rPr lang="pt-BR" sz="1200" b="1" dirty="0"/>
+              <a:rPr lang="pt-BR" sz="1300" b="1" dirty="0"/>
               <a:t>Conceito FF se o aluno tiver frequência inferior a 75% da carga horária prevista no plano da disciplina</a:t>
             </a:r>
           </a:p>
@@ -7747,7 +7781,7 @@
                   <a:srgbClr val="FF0000"/>
                 </a:solidFill>
               </a:rPr>
-              <a:t>07/07/2025</a:t>
+              <a:t>14/12/2026</a:t>
             </a:r>
           </a:p>
         </p:txBody>
